--- a/site/clases/parte-3-estadistica-inferencial/192-bayes-intro-priors-posterior-mcmc-con-pymc/clase-192-bayes-intro-priors-posterior-mcmc-con-pymc-presentacion.pptx
+++ b/site/clases/parte-3-estadistica-inferencial/192-bayes-intro-priors-posterior-mcmc-con-pymc/clase-192-bayes-intro-priors-posterior-mcmc-con-pymc-presentacion.pptx
@@ -3272,7 +3272,7 @@
                 </a:solidFill>
                 <a:latin typeface="Segoe UI"/>
               </a:rPr>
-              <a:t>Parte: 3 — Estadística Inferencial y Causal · Fuente: McElreath, Statistical Rethinking (2ª ed.) + Gelman et al., Bayesian Data Analysis (3ª ed.) + Martin, Bayesian Modeling and Computation in Python.  Duración estimada: 95 min.</a:t>
+              <a:t>Parte: 3 — Estadística Inferencial y Causal · Fuente: McElreath, Statistical Rethinking (2ª ed.) + Gelman et al., Bayesian Data Analysis (3ª ed.) + Martin, Bayesian Modeling and Computation in Python.  Duración estimada: 95 min. · Nivel: Avanzado</a:t>
             </a:r>
           </a:p>
         </p:txBody>
@@ -3581,7 +3581,7 @@
                 </a:solidFill>
                 <a:latin typeface="Segoe UI"/>
               </a:rPr>
-              <a:t>Parte: 3 — Estadística Inferencial y Causal · Fuente: McElreath, Statistical Rethinking (2ª ed.) + Gelman et al., Bayesian Data Analysis (3ª ed.) + Martin, Bayesian Modeling and Computation in Python.  Duración estimada: 95 min.</a:t>
+              <a:t>Parte: 3 — Estadística Inferencial y Causal · Fuente: McElreath, Statistical Rethinking (2ª ed.) + Gelman et al., Bayesian Data Analysis (3ª ed.) + Martin, Bayesian Modeling and Computation in Python.  Duración estimada: 95 min. · Nivel: Avanzado</a:t>
             </a:r>
           </a:p>
         </p:txBody>
@@ -4845,7 +4845,7 @@
                 </a:solidFill>
                 <a:latin typeface="Segoe UI"/>
               </a:rPr>
-              <a:t>Primer bloque ejecutable del notebook.</a:t>
+              <a:t>Con prior Beta(1,1) (uniforme) y datos binomiales, el posterior es Beta(a+éxitos, b+fracasos) — sin necesidad de MCMC. Calculamos el intervalo del 94 % con scipy.</a:t>
             </a:r>
           </a:p>
         </p:txBody>
@@ -4932,7 +4932,368 @@
                 </a:solidFill>
                 <a:latin typeface="Courier New"/>
               </a:rPr>
-              <a:t># Imports y configuración inicial</a:t>
+              <a:t>import numpy as np</a:t>
+            </a:r>
+          </a:p>
+          <a:p>
+            <a:pPr>
+              <a:defRPr sz="1200" b="0">
+                <a:solidFill>
+                  <a:srgbClr val="F8FAFC"/>
+                </a:solidFill>
+                <a:latin typeface="Courier New"/>
+              </a:defRPr>
+            </a:pPr>
+            <a:r>
+              <a:rPr sz="1200" b="0">
+                <a:solidFill>
+                  <a:srgbClr val="F8FAFC"/>
+                </a:solidFill>
+                <a:latin typeface="Courier New"/>
+              </a:rPr>
+              <a:t>from scipy import stats</a:t>
+            </a:r>
+          </a:p>
+          <a:p>
+            <a:pPr>
+              <a:defRPr sz="1200" b="0">
+                <a:solidFill>
+                  <a:srgbClr val="F8FAFC"/>
+                </a:solidFill>
+                <a:latin typeface="Courier New"/>
+              </a:defRPr>
+            </a:pPr>
+            <a:r>
+              <a:rPr sz="1200" b="0">
+                <a:solidFill>
+                  <a:srgbClr val="F8FAFC"/>
+                </a:solidFill>
+                <a:latin typeface="Courier New"/>
+              </a:rPr>
+              <a:t>import matplotlib.pyplot as plt</a:t>
+            </a:r>
+          </a:p>
+          <a:p>
+            <a:pPr>
+              <a:defRPr sz="1200" b="0">
+                <a:solidFill>
+                  <a:srgbClr val="F8FAFC"/>
+                </a:solidFill>
+                <a:latin typeface="Courier New"/>
+              </a:defRPr>
+            </a:pPr>
+            <a:r>
+              <a:rPr sz="1200" b="0">
+                <a:solidFill>
+                  <a:srgbClr val="F8FAFC"/>
+                </a:solidFill>
+                <a:latin typeface="Courier New"/>
+              </a:rPr>
+              <a:t> </a:t>
+            </a:r>
+          </a:p>
+          <a:p>
+            <a:pPr>
+              <a:defRPr sz="1200" b="0">
+                <a:solidFill>
+                  <a:srgbClr val="F8FAFC"/>
+                </a:solidFill>
+                <a:latin typeface="Courier New"/>
+              </a:defRPr>
+            </a:pPr>
+            <a:r>
+              <a:rPr sz="1200" b="0">
+                <a:solidFill>
+                  <a:srgbClr val="F8FAFC"/>
+                </a:solidFill>
+                <a:latin typeface="Courier New"/>
+              </a:rPr>
+              <a:t># 100 visitas, 8 conversiones. Prior Beta(1,1)</a:t>
+            </a:r>
+          </a:p>
+          <a:p>
+            <a:pPr>
+              <a:defRPr sz="1200" b="0">
+                <a:solidFill>
+                  <a:srgbClr val="F8FAFC"/>
+                </a:solidFill>
+                <a:latin typeface="Courier New"/>
+              </a:defRPr>
+            </a:pPr>
+            <a:r>
+              <a:rPr sz="1200" b="0">
+                <a:solidFill>
+                  <a:srgbClr val="F8FAFC"/>
+                </a:solidFill>
+                <a:latin typeface="Courier New"/>
+              </a:rPr>
+              <a:t>visitas, conversiones = 100, 8</a:t>
+            </a:r>
+          </a:p>
+          <a:p>
+            <a:pPr>
+              <a:defRPr sz="1200" b="0">
+                <a:solidFill>
+                  <a:srgbClr val="F8FAFC"/>
+                </a:solidFill>
+                <a:latin typeface="Courier New"/>
+              </a:defRPr>
+            </a:pPr>
+            <a:r>
+              <a:rPr sz="1200" b="0">
+                <a:solidFill>
+                  <a:srgbClr val="F8FAFC"/>
+                </a:solidFill>
+                <a:latin typeface="Courier New"/>
+              </a:rPr>
+              <a:t>a0, b0 = 1, 1</a:t>
+            </a:r>
+          </a:p>
+          <a:p>
+            <a:pPr>
+              <a:defRPr sz="1200" b="0">
+                <a:solidFill>
+                  <a:srgbClr val="F8FAFC"/>
+                </a:solidFill>
+                <a:latin typeface="Courier New"/>
+              </a:defRPr>
+            </a:pPr>
+            <a:r>
+              <a:rPr sz="1200" b="0">
+                <a:solidFill>
+                  <a:srgbClr val="F8FAFC"/>
+                </a:solidFill>
+                <a:latin typeface="Courier New"/>
+              </a:rPr>
+              <a:t>a_post, b_post = a0 + conversiones, b0 + (visitas - conversiones)   # Beta(9, 93)</a:t>
+            </a:r>
+          </a:p>
+          <a:p>
+            <a:pPr>
+              <a:defRPr sz="1200" b="0">
+                <a:solidFill>
+                  <a:srgbClr val="F8FAFC"/>
+                </a:solidFill>
+                <a:latin typeface="Courier New"/>
+              </a:defRPr>
+            </a:pPr>
+            <a:r>
+              <a:rPr sz="1200" b="0">
+                <a:solidFill>
+                  <a:srgbClr val="F8FAFC"/>
+                </a:solidFill>
+                <a:latin typeface="Courier New"/>
+              </a:rPr>
+              <a:t>post = stats.beta(a_post, b_post)</a:t>
+            </a:r>
+          </a:p>
+          <a:p>
+            <a:pPr>
+              <a:defRPr sz="1200" b="0">
+                <a:solidFill>
+                  <a:srgbClr val="F8FAFC"/>
+                </a:solidFill>
+                <a:latin typeface="Courier New"/>
+              </a:defRPr>
+            </a:pPr>
+            <a:r>
+              <a:rPr sz="1200" b="0">
+                <a:solidFill>
+                  <a:srgbClr val="F8FAFC"/>
+                </a:solidFill>
+                <a:latin typeface="Courier New"/>
+              </a:rPr>
+              <a:t>lo, hi = post.ppf(0.03), post.ppf(0.97)    # intervalo central del 94%</a:t>
+            </a:r>
+          </a:p>
+          <a:p>
+            <a:pPr>
+              <a:defRPr sz="1200" b="0">
+                <a:solidFill>
+                  <a:srgbClr val="F8FAFC"/>
+                </a:solidFill>
+                <a:latin typeface="Courier New"/>
+              </a:defRPr>
+            </a:pPr>
+            <a:r>
+              <a:rPr sz="1200" b="0">
+                <a:solidFill>
+                  <a:srgbClr val="F8FAFC"/>
+                </a:solidFill>
+                <a:latin typeface="Courier New"/>
+              </a:rPr>
+              <a:t>print(f"Posterior = Beta({a_post}, {b_post})")</a:t>
+            </a:r>
+          </a:p>
+          <a:p>
+            <a:pPr>
+              <a:defRPr sz="1200" b="0">
+                <a:solidFill>
+                  <a:srgbClr val="F8FAFC"/>
+                </a:solidFill>
+                <a:latin typeface="Courier New"/>
+              </a:defRPr>
+            </a:pPr>
+            <a:r>
+              <a:rPr sz="1200" b="0">
+                <a:solidFill>
+                  <a:srgbClr val="F8FAFC"/>
+                </a:solidFill>
+                <a:latin typeface="Courier New"/>
+              </a:rPr>
+              <a:t>print(f"media posterior = {post.mean():.3f}")</a:t>
+            </a:r>
+          </a:p>
+          <a:p>
+            <a:pPr>
+              <a:defRPr sz="1200" b="0">
+                <a:solidFill>
+                  <a:srgbClr val="F8FAFC"/>
+                </a:solidFill>
+                <a:latin typeface="Courier New"/>
+              </a:defRPr>
+            </a:pPr>
+            <a:r>
+              <a:rPr sz="1200" b="0">
+                <a:solidFill>
+                  <a:srgbClr val="F8FAFC"/>
+                </a:solidFill>
+                <a:latin typeface="Courier New"/>
+              </a:rPr>
+              <a:t>print(f"intervalo 94% = ({lo:.3f}, {hi:.3f})")</a:t>
+            </a:r>
+          </a:p>
+          <a:p>
+            <a:pPr>
+              <a:defRPr sz="1200" b="0">
+                <a:solidFill>
+                  <a:srgbClr val="F8FAFC"/>
+                </a:solidFill>
+                <a:latin typeface="Courier New"/>
+              </a:defRPr>
+            </a:pPr>
+            <a:r>
+              <a:rPr sz="1200" b="0">
+                <a:solidFill>
+                  <a:srgbClr val="F8FAFC"/>
+                </a:solidFill>
+                <a:latin typeface="Courier New"/>
+              </a:rPr>
+              <a:t> </a:t>
+            </a:r>
+          </a:p>
+          <a:p>
+            <a:pPr>
+              <a:defRPr sz="1200" b="0">
+                <a:solidFill>
+                  <a:srgbClr val="F8FAFC"/>
+                </a:solidFill>
+                <a:latin typeface="Courier New"/>
+              </a:defRPr>
+            </a:pPr>
+            <a:r>
+              <a:rPr sz="1200" b="0">
+                <a:solidFill>
+                  <a:srgbClr val="F8FAFC"/>
+                </a:solidFill>
+                <a:latin typeface="Courier New"/>
+              </a:rPr>
+              <a:t>grid = np.linspace(0, 0.25, 300)</a:t>
+            </a:r>
+          </a:p>
+          <a:p>
+            <a:pPr>
+              <a:defRPr sz="1200" b="0">
+                <a:solidFill>
+                  <a:srgbClr val="F8FAFC"/>
+                </a:solidFill>
+                <a:latin typeface="Courier New"/>
+              </a:defRPr>
+            </a:pPr>
+            <a:r>
+              <a:rPr sz="1200" b="0">
+                <a:solidFill>
+                  <a:srgbClr val="F8FAFC"/>
+                </a:solidFill>
+                <a:latin typeface="Courier New"/>
+              </a:rPr>
+              <a:t>plt.figure(figsize=(7, 4))</a:t>
+            </a:r>
+          </a:p>
+          <a:p>
+            <a:pPr>
+              <a:defRPr sz="1200" b="0">
+                <a:solidFill>
+                  <a:srgbClr val="F8FAFC"/>
+                </a:solidFill>
+                <a:latin typeface="Courier New"/>
+              </a:defRPr>
+            </a:pPr>
+            <a:r>
+              <a:rPr sz="1200" b="0">
+                <a:solidFill>
+                  <a:srgbClr val="F8FAFC"/>
+                </a:solidFill>
+                <a:latin typeface="Courier New"/>
+              </a:rPr>
+              <a:t>plt.plot(grid, stats.beta(a0, b0).pdf(grid), label="prior Beta(1,1)")</a:t>
+            </a:r>
+          </a:p>
+          <a:p>
+            <a:pPr>
+              <a:defRPr sz="1200" b="0">
+                <a:solidFill>
+                  <a:srgbClr val="F8FAFC"/>
+                </a:solidFill>
+                <a:latin typeface="Courier New"/>
+              </a:defRPr>
+            </a:pPr>
+            <a:r>
+              <a:rPr sz="1200" b="0">
+                <a:solidFill>
+                  <a:srgbClr val="F8FAFC"/>
+                </a:solidFill>
+                <a:latin typeface="Courier New"/>
+              </a:rPr>
+              <a:t>plt.plot(grid, post.pdf(grid), label=f"posterior Beta({a_post},{b_post})")</a:t>
+            </a:r>
+          </a:p>
+          <a:p>
+            <a:pPr>
+              <a:defRPr sz="1200" b="0">
+                <a:solidFill>
+                  <a:srgbClr val="F8FAFC"/>
+                </a:solidFill>
+                <a:latin typeface="Courier New"/>
+              </a:defRPr>
+            </a:pPr>
+            <a:r>
+              <a:rPr sz="1200" b="0">
+                <a:solidFill>
+                  <a:srgbClr val="F8FAFC"/>
+                </a:solidFill>
+                <a:latin typeface="Courier New"/>
+              </a:rPr>
+              <a:t>plt.title("Actualización bayesiana: prior -&gt; posterior"); plt.legend()</a:t>
+            </a:r>
+          </a:p>
+          <a:p>
+            <a:pPr>
+              <a:defRPr sz="1200" b="0">
+                <a:solidFill>
+                  <a:srgbClr val="F8FAFC"/>
+                </a:solidFill>
+                <a:latin typeface="Courier New"/>
+              </a:defRPr>
+            </a:pPr>
+            <a:r>
+              <a:rPr sz="1200" b="0">
+                <a:solidFill>
+                  <a:srgbClr val="F8FAFC"/>
+                </a:solidFill>
+                <a:latin typeface="Courier New"/>
+              </a:rPr>
+              <a:t>plt.tight_layout(); plt.show()</a:t>
             </a:r>
           </a:p>
         </p:txBody>
